--- a/에너지경제학/07_Reference/에너지경제학_박영사_김동훈 강의자료/에너지경제학 제7장.pptx
+++ b/에너지경제학/07_Reference/에너지경제학_박영사_김동훈 강의자료/에너지경제학 제7장.pptx
@@ -626,7 +626,7 @@
               <a:pPr lvl="0">
                 <a:defRPr/>
               </a:pPr>
-              <a:t>2026-02-26</a:t>
+              <a:t>2026-06-17</a:t>
             </a:fld>
             <a:endParaRPr lang="ko-KR" altLang="en-US"/>
           </a:p>
@@ -809,7 +809,7 @@
               <a:pPr lvl="0">
                 <a:defRPr/>
               </a:pPr>
-              <a:t>2026-02-26</a:t>
+              <a:t>2026-06-17</a:t>
             </a:fld>
             <a:endParaRPr lang="ko-KR" altLang="en-US"/>
           </a:p>
@@ -1286,7 +1286,7 @@
               <a:pPr lvl="0">
                 <a:defRPr/>
               </a:pPr>
-              <a:t>2026-02-26</a:t>
+              <a:t>2026-06-17</a:t>
             </a:fld>
             <a:endParaRPr lang="ko-KR" altLang="en-US"/>
           </a:p>
@@ -1430,7 +1430,7 @@
               <a:pPr lvl="0">
                 <a:defRPr/>
               </a:pPr>
-              <a:t>2026-02-26</a:t>
+              <a:t>2026-06-17</a:t>
             </a:fld>
             <a:endParaRPr lang="ko-KR" altLang="en-US"/>
           </a:p>
@@ -1637,7 +1637,7 @@
               <a:pPr lvl="0">
                 <a:defRPr/>
               </a:pPr>
-              <a:t>2026-02-26</a:t>
+              <a:t>2026-06-17</a:t>
             </a:fld>
             <a:endParaRPr lang="ko-KR" altLang="en-US"/>
           </a:p>
@@ -1831,7 +1831,7 @@
               <a:pPr lvl="0">
                 <a:defRPr/>
               </a:pPr>
-              <a:t>2026-02-26</a:t>
+              <a:t>2026-06-17</a:t>
             </a:fld>
             <a:endParaRPr lang="ko-KR" altLang="en-US"/>
           </a:p>
@@ -2015,7 +2015,7 @@
               <a:pPr lvl="0">
                 <a:defRPr/>
               </a:pPr>
-              <a:t>2026-02-26</a:t>
+              <a:t>2026-06-17</a:t>
             </a:fld>
             <a:endParaRPr lang="ko-KR" altLang="en-US"/>
           </a:p>
@@ -2129,7 +2129,7 @@
               <a:pPr lvl="0">
                 <a:defRPr/>
               </a:pPr>
-              <a:t>2026-02-26</a:t>
+              <a:t>2026-06-17</a:t>
             </a:fld>
             <a:endParaRPr lang="ko-KR" altLang="en-US"/>
           </a:p>
@@ -2390,7 +2390,7 @@
               <a:pPr lvl="0">
                 <a:defRPr/>
               </a:pPr>
-              <a:t>2026-02-26</a:t>
+              <a:t>2026-06-17</a:t>
             </a:fld>
             <a:endParaRPr lang="ko-KR" altLang="en-US"/>
           </a:p>
@@ -2691,7 +2691,7 @@
               <a:pPr lvl="0">
                 <a:defRPr/>
               </a:pPr>
-              <a:t>2026-02-26</a:t>
+              <a:t>2026-06-17</a:t>
             </a:fld>
             <a:endParaRPr lang="ko-KR" altLang="en-US"/>
           </a:p>
@@ -2824,7 +2824,7 @@
               <a:pPr lvl="0">
                 <a:defRPr/>
               </a:pPr>
-              <a:t>2026-02-26</a:t>
+              <a:t>2026-06-17</a:t>
             </a:fld>
             <a:endParaRPr lang="ko-KR" altLang="en-US"/>
           </a:p>
@@ -2991,7 +2991,7 @@
               <a:pPr lvl="0">
                 <a:defRPr/>
               </a:pPr>
-              <a:t>2026-02-26</a:t>
+              <a:t>2026-06-17</a:t>
             </a:fld>
             <a:endParaRPr lang="ko-KR" altLang="en-US"/>
           </a:p>
@@ -3460,7 +3460,7 @@
               <a:pPr lvl="0">
                 <a:defRPr/>
               </a:pPr>
-              <a:t>2026-02-26</a:t>
+              <a:t>2026-06-17</a:t>
             </a:fld>
             <a:endParaRPr lang="ko-KR" altLang="en-US"/>
           </a:p>
@@ -3732,7 +3732,7 @@
               <a:pPr lvl="0">
                 <a:defRPr/>
               </a:pPr>
-              <a:t>2026-02-26</a:t>
+              <a:t>2026-06-17</a:t>
             </a:fld>
             <a:endParaRPr lang="ko-KR" altLang="en-US"/>
           </a:p>
@@ -3960,7 +3960,7 @@
               <a:pPr lvl="0">
                 <a:defRPr/>
               </a:pPr>
-              <a:t>2026-02-26</a:t>
+              <a:t>2026-06-17</a:t>
             </a:fld>
             <a:endParaRPr lang="ko-KR" altLang="en-US"/>
           </a:p>
@@ -26524,15 +26524,15 @@
               <a:defRPr/>
             </a:pPr>
             <a:r>
-              <a:rPr lang="en-US" altLang="ko-KR"/>
+              <a:rPr lang="en-US" altLang="ko-KR" dirty="0"/>
               <a:t>[</a:t>
             </a:r>
             <a:r>
-              <a:rPr lang="ko-KR" altLang="en-US"/>
+              <a:rPr lang="ko-KR" altLang="en-US" dirty="0"/>
               <a:t>그림 </a:t>
             </a:r>
             <a:r>
-              <a:rPr lang="en-US" altLang="ko-KR"/>
+              <a:rPr lang="en-US" altLang="ko-KR" dirty="0"/>
               <a:t>7-5]</a:t>
             </a:r>
             <a:r>
@@ -26540,23 +26540,23 @@
               <a:t> 지역별 석탄 가격의 변동</a:t>
             </a:r>
             <a:r>
-              <a:rPr lang="en-US" altLang="ko-KR"/>
+              <a:rPr lang="en-US" altLang="ko-KR" dirty="0"/>
               <a:t>(</a:t>
             </a:r>
             <a:r>
-              <a:rPr lang="ko-KR" altLang="en-US"/>
+              <a:rPr lang="ko-KR" altLang="en-US" dirty="0"/>
               <a:t>달러</a:t>
             </a:r>
             <a:r>
-              <a:rPr lang="en-US" altLang="ko-KR"/>
+              <a:rPr lang="en-US" altLang="ko-KR" dirty="0"/>
               <a:t>/</a:t>
             </a:r>
             <a:r>
-              <a:rPr lang="ko-KR" altLang="en-US"/>
+              <a:rPr lang="ko-KR" altLang="en-US" dirty="0"/>
               <a:t>톤</a:t>
             </a:r>
             <a:r>
-              <a:rPr lang="en-US" altLang="ko-KR"/>
+              <a:rPr lang="en-US" altLang="ko-KR" dirty="0"/>
               <a:t>)</a:t>
             </a:r>
           </a:p>
